--- a/docs/pptx/Ch1_P1_Design_Specification_ADT.pptx
+++ b/docs/pptx/Ch1_P1_Design_Specification_ADT.pptx
@@ -528,10 +528,25 @@
           <a:lstStyle/>
           <a:p>
             <a:r>
-              <a:rPr lang="en-US" dirty="0"/>
-              <a:t/>
-            </a:r>
-            <a:endParaRPr lang="en-US" dirty="0"/>
+              <a:t>TITRE : Design Specification des ADT</a:t>
+            </a:r>
+          </a:p>
+          <a:p>
+            <a:r>
+              <a:t>Durée : 2h</a:t>
+            </a:r>
+          </a:p>
+          <a:p/>
+          <a:p>
+            <a:r>
+              <a:t>Objectif : les étudiants doivent comprendre ce qu'est un ADT et savoir les différencier des structures concrètes.</a:t>
+            </a:r>
+          </a:p>
+          <a:p/>
+          <a:p>
+            <a:r>
+              <a:t>Matériel : site unite19-gamifie.vercel.app → Monde 1 → Ch1</a:t>
+            </a:r>
           </a:p>
         </p:txBody>
       </p:sp>
@@ -1496,10 +1511,19 @@
           <a:lstStyle/>
           <a:p>
             <a:r>
-              <a:rPr lang="en-US" dirty="0"/>
-              <a:t/>
-            </a:r>
-            <a:endParaRPr lang="en-US" dirty="0"/>
+              <a:t>PROF: Commencer par demander 'Qu'est-ce qu'une structure de données ?'</a:t>
+            </a:r>
+          </a:p>
+          <a:p>
+            <a:r>
+              <a:t>Laisser les étudiants répondre avant de montrer la slide.</a:t>
+            </a:r>
+          </a:p>
+          <a:p/>
+          <a:p>
+            <a:r>
+              <a:t>Objectifs à écrire au tableau.</a:t>
+            </a:r>
           </a:p>
         </p:txBody>
       </p:sp>
@@ -2376,10 +2400,20 @@
           <a:lstStyle/>
           <a:p>
             <a:r>
-              <a:rPr lang="en-US" dirty="0"/>
-              <a:t/>
-            </a:r>
-            <a:endParaRPr lang="en-US" dirty="0"/>
+              <a:t>PROF: ADT = Type Abstrait de Données.</a:t>
+            </a:r>
+          </a:p>
+          <a:p/>
+          <a:p>
+            <a:r>
+              <a:t>Analogie : un ADT est comme le MODE D'EMPLOI d'un appareil. Il dit CE QU'ON PEUT FAIRE sans expliquer COMMENT ça fonctionne à l'intérieur.</a:t>
+            </a:r>
+          </a:p>
+          <a:p/>
+          <a:p>
+            <a:r>
+              <a:t>Exemple : l'ADT 'Télévision' a les opérations : allumer(), éteindre(), changerChaine(), réglerVolume(). On n'a pas besoin de savoir comment l'écran affiche les pixels.</a:t>
+            </a:r>
           </a:p>
         </p:txBody>
       </p:sp>
@@ -2464,10 +2498,25 @@
           <a:lstStyle/>
           <a:p>
             <a:r>
-              <a:rPr lang="en-US" dirty="0"/>
-              <a:t/>
-            </a:r>
-            <a:endParaRPr lang="en-US" dirty="0"/>
+              <a:t>PROF: C'est LE concept clé à faire passer.</a:t>
+            </a:r>
+          </a:p>
+          <a:p/>
+          <a:p>
+            <a:r>
+              <a:t>ADT List → peut être implémenté par ArrayList OU LinkedList.</a:t>
+            </a:r>
+          </a:p>
+          <a:p>
+            <a:r>
+              <a:t>Même interface (add, get, remove) mais performance différente.</a:t>
+            </a:r>
+          </a:p>
+          <a:p/>
+          <a:p>
+            <a:r>
+              <a:t>Question : 'Si je veux accéder souvent par index, quelle implémentation je choisis ?' → ArrayList O(1) vs LinkedList O(n).</a:t>
+            </a:r>
           </a:p>
         </p:txBody>
       </p:sp>
@@ -2552,10 +2601,45 @@
           <a:lstStyle/>
           <a:p>
             <a:r>
-              <a:rPr lang="en-US" dirty="0"/>
-              <a:t/>
-            </a:r>
-            <a:endParaRPr lang="en-US" dirty="0"/>
+              <a:t>PROF: Parcourir les 5 ADT fondamentaux.</a:t>
+            </a:r>
+          </a:p>
+          <a:p/>
+          <a:p>
+            <a:r>
+              <a:t>Pour chacun, demander à un étudiant de donner un exemple de la vie réelle :</a:t>
+            </a:r>
+          </a:p>
+          <a:p>
+            <a:r>
+              <a:t>- List → liste de courses</a:t>
+            </a:r>
+          </a:p>
+          <a:p>
+            <a:r>
+              <a:t>- Stack → pile d'assiettes</a:t>
+            </a:r>
+          </a:p>
+          <a:p>
+            <a:r>
+              <a:t>- Queue → file d'attente au cinéma</a:t>
+            </a:r>
+          </a:p>
+          <a:p>
+            <a:r>
+              <a:t>- Map → dictionnaire (mot → définition)</a:t>
+            </a:r>
+          </a:p>
+          <a:p>
+            <a:r>
+              <a:t>- Set → collection de timbres (pas de doublons)</a:t>
+            </a:r>
+          </a:p>
+          <a:p/>
+          <a:p>
+            <a:r>
+              <a:t>Exercice : ouvrir le site et faire le jeu drag-and-drop des opérations.</a:t>
+            </a:r>
           </a:p>
         </p:txBody>
       </p:sp>
